--- a/submission pptx/ad24-1-presentation.pptx
+++ b/submission pptx/ad24-1-presentation.pptx
@@ -13370,48 +13370,6 @@
       </p:sp>
       <p:sp>
         <p:nvSpPr>
-          <p:cNvPr id="35" name="Shape 7">
-            <a:extLst>
-              <a:ext uri="{FF2B5EF4-FFF2-40B4-BE49-F238E27FC236}">
-                <a16:creationId xmlns:a16="http://schemas.microsoft.com/office/drawing/2014/main" id="{9EF020FC-82A4-271E-C089-C92066DA8647}"/>
-              </a:ext>
-            </a:extLst>
-          </p:cNvPr>
-          <p:cNvSpPr/>
-          <p:nvPr/>
-        </p:nvSpPr>
-        <p:spPr>
-          <a:xfrm>
-            <a:off x="6997731" y="804672"/>
-            <a:ext cx="822960" cy="384048"/>
-          </a:xfrm>
-          <a:prstGeom prst="rect">
-            <a:avLst/>
-          </a:prstGeom>
-          <a:solidFill>
-            <a:srgbClr val="111122"/>
-          </a:solidFill>
-          <a:ln w="6350">
-            <a:solidFill>
-              <a:srgbClr val="00E676"/>
-            </a:solidFill>
-            <a:prstDash val="solid"/>
-          </a:ln>
-        </p:spPr>
-        <p:txBody>
-          <a:bodyPr/>
-          <a:lstStyle/>
-          <a:p>
-            <a:endParaRPr lang="de-CH" sz="1100" dirty="0">
-              <a:solidFill>
-                <a:srgbClr val="1DB954"/>
-              </a:solidFill>
-            </a:endParaRPr>
-          </a:p>
-        </p:txBody>
-      </p:sp>
-      <p:sp>
-        <p:nvSpPr>
           <p:cNvPr id="37" name="Text 9">
             <a:extLst>
               <a:ext uri="{FF2B5EF4-FFF2-40B4-BE49-F238E27FC236}">
@@ -13424,7 +13382,7 @@
         </p:nvSpPr>
         <p:spPr>
           <a:xfrm>
-            <a:off x="5341524" y="1155174"/>
+            <a:off x="5353824" y="1102267"/>
             <a:ext cx="1628778" cy="732088"/>
           </a:xfrm>
           <a:prstGeom prst="rect">
@@ -13565,7 +13523,7 @@
         </p:nvSpPr>
         <p:spPr>
           <a:xfrm>
-            <a:off x="6932456" y="1240456"/>
+            <a:off x="7000248" y="1141764"/>
             <a:ext cx="1751539" cy="692497"/>
           </a:xfrm>
           <a:prstGeom prst="rect">
@@ -13630,10 +13588,48 @@
       </p:sp>
       <p:sp>
         <p:nvSpPr>
-          <p:cNvPr id="15" name="TextBox 14">
+          <p:cNvPr id="9" name="Shape 7">
             <a:extLst>
               <a:ext uri="{FF2B5EF4-FFF2-40B4-BE49-F238E27FC236}">
-                <a16:creationId xmlns:a16="http://schemas.microsoft.com/office/drawing/2014/main" id="{0A9A4F41-8EFD-CD88-F038-B7D693DBC4D9}"/>
+                <a16:creationId xmlns:a16="http://schemas.microsoft.com/office/drawing/2014/main" id="{76F9E657-0105-05CF-7418-18B8EE8A08AC}"/>
+              </a:ext>
+            </a:extLst>
+          </p:cNvPr>
+          <p:cNvSpPr/>
+          <p:nvPr/>
+        </p:nvSpPr>
+        <p:spPr>
+          <a:xfrm>
+            <a:off x="7000248" y="743214"/>
+            <a:ext cx="822960" cy="384048"/>
+          </a:xfrm>
+          <a:prstGeom prst="rect">
+            <a:avLst/>
+          </a:prstGeom>
+          <a:solidFill>
+            <a:srgbClr val="111122"/>
+          </a:solidFill>
+          <a:ln w="6350">
+            <a:solidFill>
+              <a:srgbClr val="00E676"/>
+            </a:solidFill>
+            <a:prstDash val="solid"/>
+          </a:ln>
+        </p:spPr>
+        <p:txBody>
+          <a:bodyPr/>
+          <a:lstStyle/>
+          <a:p>
+            <a:endParaRPr lang="de-CH" dirty="0"/>
+          </a:p>
+        </p:txBody>
+      </p:sp>
+      <p:sp>
+        <p:nvSpPr>
+          <p:cNvPr id="10" name="TextBox 9">
+            <a:extLst>
+              <a:ext uri="{FF2B5EF4-FFF2-40B4-BE49-F238E27FC236}">
+                <a16:creationId xmlns:a16="http://schemas.microsoft.com/office/drawing/2014/main" id="{5E91BF95-AB3E-615A-BB68-EF87506918F5}"/>
               </a:ext>
             </a:extLst>
           </p:cNvPr>
@@ -13642,7 +13638,7 @@
         </p:nvSpPr>
         <p:spPr>
           <a:xfrm>
-            <a:off x="6997731" y="875731"/>
+            <a:off x="7000248" y="794538"/>
             <a:ext cx="954020" cy="261610"/>
           </a:xfrm>
           <a:prstGeom prst="rect">

--- a/submission pptx/ad24-1-presentation.pptx
+++ b/submission pptx/ad24-1-presentation.pptx
@@ -5806,7 +5806,7 @@
         </p:blipFill>
         <p:spPr>
           <a:xfrm>
-            <a:off x="2205886" y="1188720"/>
+            <a:off x="1130848" y="1188720"/>
             <a:ext cx="3234794" cy="3698748"/>
           </a:xfrm>
           <a:prstGeom prst="rect">
@@ -13050,8 +13050,8 @@
         </p:blipFill>
         <p:spPr>
           <a:xfrm>
-            <a:off x="457199" y="1683421"/>
-            <a:ext cx="3297977" cy="2474921"/>
+            <a:off x="339948" y="1310503"/>
+            <a:ext cx="4038305" cy="3030490"/>
           </a:xfrm>
           <a:prstGeom prst="rect">
             <a:avLst/>
@@ -13080,8 +13080,8 @@
         </p:blipFill>
         <p:spPr>
           <a:xfrm>
-            <a:off x="4697560" y="2229091"/>
-            <a:ext cx="3600540" cy="2469735"/>
+            <a:off x="4765745" y="2117454"/>
+            <a:ext cx="4038306" cy="2770014"/>
           </a:xfrm>
           <a:prstGeom prst="rect">
             <a:avLst/>

--- a/submission pptx/ad24-1-presentation.pptx
+++ b/submission pptx/ad24-1-presentation.pptx
@@ -13050,8 +13050,8 @@
         </p:blipFill>
         <p:spPr>
           <a:xfrm>
-            <a:off x="339948" y="1310503"/>
-            <a:ext cx="4038305" cy="3030490"/>
+            <a:off x="339948" y="1310502"/>
+            <a:ext cx="4193824" cy="3147197"/>
           </a:xfrm>
           <a:prstGeom prst="rect">
             <a:avLst/>
@@ -13471,7 +13471,7 @@
         </p:blipFill>
         <p:spPr>
           <a:xfrm>
-            <a:off x="211619" y="1434606"/>
+            <a:off x="179109" y="1298448"/>
             <a:ext cx="3964577" cy="3878945"/>
           </a:xfrm>
           <a:prstGeom prst="rect">
